--- a/Battle os/Battle_OS_Waltener_FINAL  -  Réparation.pptx
+++ b/Battle os/Battle_OS_Waltener_FINAL  -  Réparation.pptx
@@ -4813,6 +4813,46 @@
           </a:p>
         </p:txBody>
       </p:sp>
+      <p:sp>
+        <p:nvSpPr>
+          <p:cNvPr id="29" name="ZoneTexte 28">
+            <a:extLst>
+              <a:ext uri="{FF2B5EF4-FFF2-40B4-BE49-F238E27FC236}">
+                <a16:creationId xmlns:a16="http://schemas.microsoft.com/office/drawing/2014/main" id="{5D8F7E5A-B860-CFD0-9375-58467274EF7D}"/>
+              </a:ext>
+            </a:extLst>
+          </p:cNvPr>
+          <p:cNvSpPr txBox="1"/>
+          <p:nvPr/>
+        </p:nvSpPr>
+        <p:spPr>
+          <a:xfrm>
+            <a:off x="0" y="4864100"/>
+            <a:ext cx="9144000" cy="230832"/>
+          </a:xfrm>
+          <a:prstGeom prst="rect">
+            <a:avLst/>
+          </a:prstGeom>
+          <a:noFill/>
+        </p:spPr>
+        <p:txBody>
+          <a:bodyPr vert="horz" rtlCol="0">
+            <a:spAutoFit/>
+          </a:bodyPr>
+          <a:lstStyle/>
+          <a:p>
+            <a:pPr algn="ctr"/>
+            <a:r>
+              <a:rPr lang="fr-FR" sz="900">
+                <a:solidFill>
+                  <a:srgbClr val="B4B4B4"/>
+                </a:solidFill>
+              </a:rPr>
+              <a:t>(c) titi_23 - mediateur-numerique.github.io - Reproduction interdite sans autorisation</a:t>
+            </a:r>
+          </a:p>
+        </p:txBody>
+      </p:sp>
     </p:spTree>
   </p:cSld>
   <p:clrMapOvr>
@@ -6061,6 +6101,46 @@
           </a:p>
         </p:txBody>
       </p:sp>
+      <p:sp>
+        <p:nvSpPr>
+          <p:cNvPr id="35" name="ZoneTexte 34">
+            <a:extLst>
+              <a:ext uri="{FF2B5EF4-FFF2-40B4-BE49-F238E27FC236}">
+                <a16:creationId xmlns:a16="http://schemas.microsoft.com/office/drawing/2014/main" id="{62F76C84-3DC4-E119-82A4-97A962C2C36F}"/>
+              </a:ext>
+            </a:extLst>
+          </p:cNvPr>
+          <p:cNvSpPr txBox="1"/>
+          <p:nvPr/>
+        </p:nvSpPr>
+        <p:spPr>
+          <a:xfrm>
+            <a:off x="0" y="4864100"/>
+            <a:ext cx="9144000" cy="230832"/>
+          </a:xfrm>
+          <a:prstGeom prst="rect">
+            <a:avLst/>
+          </a:prstGeom>
+          <a:noFill/>
+        </p:spPr>
+        <p:txBody>
+          <a:bodyPr vert="horz" rtlCol="0">
+            <a:spAutoFit/>
+          </a:bodyPr>
+          <a:lstStyle/>
+          <a:p>
+            <a:pPr algn="ctr"/>
+            <a:r>
+              <a:rPr lang="fr-FR" sz="900">
+                <a:solidFill>
+                  <a:srgbClr val="B4B4B4"/>
+                </a:solidFill>
+              </a:rPr>
+              <a:t>(c) titi_23 - mediateur-numerique.github.io - Reproduction interdite sans autorisation</a:t>
+            </a:r>
+          </a:p>
+        </p:txBody>
+      </p:sp>
     </p:spTree>
   </p:cSld>
   <p:clrMapOvr>
@@ -6467,6 +6547,46 @@
           </a:p>
         </p:txBody>
       </p:sp>
+      <p:sp>
+        <p:nvSpPr>
+          <p:cNvPr id="12" name="ZoneTexte 11">
+            <a:extLst>
+              <a:ext uri="{FF2B5EF4-FFF2-40B4-BE49-F238E27FC236}">
+                <a16:creationId xmlns:a16="http://schemas.microsoft.com/office/drawing/2014/main" id="{A8A592EB-FF05-C4E3-4085-547BC8B4EB45}"/>
+              </a:ext>
+            </a:extLst>
+          </p:cNvPr>
+          <p:cNvSpPr txBox="1"/>
+          <p:nvPr/>
+        </p:nvSpPr>
+        <p:spPr>
+          <a:xfrm>
+            <a:off x="0" y="4864100"/>
+            <a:ext cx="9144000" cy="230832"/>
+          </a:xfrm>
+          <a:prstGeom prst="rect">
+            <a:avLst/>
+          </a:prstGeom>
+          <a:noFill/>
+        </p:spPr>
+        <p:txBody>
+          <a:bodyPr vert="horz" rtlCol="0">
+            <a:spAutoFit/>
+          </a:bodyPr>
+          <a:lstStyle/>
+          <a:p>
+            <a:pPr algn="ctr"/>
+            <a:r>
+              <a:rPr lang="fr-FR" sz="900">
+                <a:solidFill>
+                  <a:srgbClr val="B4B4B4"/>
+                </a:solidFill>
+              </a:rPr>
+              <a:t>(c) titi_23 - mediateur-numerique.github.io - Reproduction interdite sans autorisation</a:t>
+            </a:r>
+          </a:p>
+        </p:txBody>
+      </p:sp>
     </p:spTree>
   </p:cSld>
   <p:clrMapOvr>
@@ -7715,6 +7835,46 @@
           </a:p>
         </p:txBody>
       </p:sp>
+      <p:sp>
+        <p:nvSpPr>
+          <p:cNvPr id="35" name="ZoneTexte 34">
+            <a:extLst>
+              <a:ext uri="{FF2B5EF4-FFF2-40B4-BE49-F238E27FC236}">
+                <a16:creationId xmlns:a16="http://schemas.microsoft.com/office/drawing/2014/main" id="{CECAB75D-8139-6FC5-EC0C-F2A1CD1164A8}"/>
+              </a:ext>
+            </a:extLst>
+          </p:cNvPr>
+          <p:cNvSpPr txBox="1"/>
+          <p:nvPr/>
+        </p:nvSpPr>
+        <p:spPr>
+          <a:xfrm>
+            <a:off x="0" y="4864100"/>
+            <a:ext cx="9144000" cy="230832"/>
+          </a:xfrm>
+          <a:prstGeom prst="rect">
+            <a:avLst/>
+          </a:prstGeom>
+          <a:noFill/>
+        </p:spPr>
+        <p:txBody>
+          <a:bodyPr vert="horz" rtlCol="0">
+            <a:spAutoFit/>
+          </a:bodyPr>
+          <a:lstStyle/>
+          <a:p>
+            <a:pPr algn="ctr"/>
+            <a:r>
+              <a:rPr lang="fr-FR" sz="900">
+                <a:solidFill>
+                  <a:srgbClr val="B4B4B4"/>
+                </a:solidFill>
+              </a:rPr>
+              <a:t>(c) titi_23 - mediateur-numerique.github.io - Reproduction interdite sans autorisation</a:t>
+            </a:r>
+          </a:p>
+        </p:txBody>
+      </p:sp>
     </p:spTree>
   </p:cSld>
   <p:clrMapOvr>
@@ -8121,6 +8281,46 @@
           </a:p>
         </p:txBody>
       </p:sp>
+      <p:sp>
+        <p:nvSpPr>
+          <p:cNvPr id="12" name="ZoneTexte 11">
+            <a:extLst>
+              <a:ext uri="{FF2B5EF4-FFF2-40B4-BE49-F238E27FC236}">
+                <a16:creationId xmlns:a16="http://schemas.microsoft.com/office/drawing/2014/main" id="{7650ADFE-3328-02EC-6F63-09C5E65CBFF6}"/>
+              </a:ext>
+            </a:extLst>
+          </p:cNvPr>
+          <p:cNvSpPr txBox="1"/>
+          <p:nvPr/>
+        </p:nvSpPr>
+        <p:spPr>
+          <a:xfrm>
+            <a:off x="0" y="4864100"/>
+            <a:ext cx="9144000" cy="230832"/>
+          </a:xfrm>
+          <a:prstGeom prst="rect">
+            <a:avLst/>
+          </a:prstGeom>
+          <a:noFill/>
+        </p:spPr>
+        <p:txBody>
+          <a:bodyPr vert="horz" rtlCol="0">
+            <a:spAutoFit/>
+          </a:bodyPr>
+          <a:lstStyle/>
+          <a:p>
+            <a:pPr algn="ctr"/>
+            <a:r>
+              <a:rPr lang="fr-FR" sz="900">
+                <a:solidFill>
+                  <a:srgbClr val="B4B4B4"/>
+                </a:solidFill>
+              </a:rPr>
+              <a:t>(c) titi_23 - mediateur-numerique.github.io - Reproduction interdite sans autorisation</a:t>
+            </a:r>
+          </a:p>
+        </p:txBody>
+      </p:sp>
     </p:spTree>
   </p:cSld>
   <p:clrMapOvr>
@@ -9369,6 +9569,46 @@
           </a:p>
         </p:txBody>
       </p:sp>
+      <p:sp>
+        <p:nvSpPr>
+          <p:cNvPr id="35" name="ZoneTexte 34">
+            <a:extLst>
+              <a:ext uri="{FF2B5EF4-FFF2-40B4-BE49-F238E27FC236}">
+                <a16:creationId xmlns:a16="http://schemas.microsoft.com/office/drawing/2014/main" id="{6843C234-A99E-FFD1-2299-D598DB3800E1}"/>
+              </a:ext>
+            </a:extLst>
+          </p:cNvPr>
+          <p:cNvSpPr txBox="1"/>
+          <p:nvPr/>
+        </p:nvSpPr>
+        <p:spPr>
+          <a:xfrm>
+            <a:off x="0" y="4864100"/>
+            <a:ext cx="9144000" cy="230832"/>
+          </a:xfrm>
+          <a:prstGeom prst="rect">
+            <a:avLst/>
+          </a:prstGeom>
+          <a:noFill/>
+        </p:spPr>
+        <p:txBody>
+          <a:bodyPr vert="horz" rtlCol="0">
+            <a:spAutoFit/>
+          </a:bodyPr>
+          <a:lstStyle/>
+          <a:p>
+            <a:pPr algn="ctr"/>
+            <a:r>
+              <a:rPr lang="fr-FR" sz="900">
+                <a:solidFill>
+                  <a:srgbClr val="B4B4B4"/>
+                </a:solidFill>
+              </a:rPr>
+              <a:t>(c) titi_23 - mediateur-numerique.github.io - Reproduction interdite sans autorisation</a:t>
+            </a:r>
+          </a:p>
+        </p:txBody>
+      </p:sp>
     </p:spTree>
   </p:cSld>
   <p:clrMapOvr>
@@ -9775,6 +10015,46 @@
           </a:p>
         </p:txBody>
       </p:sp>
+      <p:sp>
+        <p:nvSpPr>
+          <p:cNvPr id="12" name="ZoneTexte 11">
+            <a:extLst>
+              <a:ext uri="{FF2B5EF4-FFF2-40B4-BE49-F238E27FC236}">
+                <a16:creationId xmlns:a16="http://schemas.microsoft.com/office/drawing/2014/main" id="{C991E204-807A-8A97-1106-255741E6A9BA}"/>
+              </a:ext>
+            </a:extLst>
+          </p:cNvPr>
+          <p:cNvSpPr txBox="1"/>
+          <p:nvPr/>
+        </p:nvSpPr>
+        <p:spPr>
+          <a:xfrm>
+            <a:off x="0" y="4864100"/>
+            <a:ext cx="9144000" cy="230832"/>
+          </a:xfrm>
+          <a:prstGeom prst="rect">
+            <a:avLst/>
+          </a:prstGeom>
+          <a:noFill/>
+        </p:spPr>
+        <p:txBody>
+          <a:bodyPr vert="horz" rtlCol="0">
+            <a:spAutoFit/>
+          </a:bodyPr>
+          <a:lstStyle/>
+          <a:p>
+            <a:pPr algn="ctr"/>
+            <a:r>
+              <a:rPr lang="fr-FR" sz="900">
+                <a:solidFill>
+                  <a:srgbClr val="B4B4B4"/>
+                </a:solidFill>
+              </a:rPr>
+              <a:t>(c) titi_23 - mediateur-numerique.github.io - Reproduction interdite sans autorisation</a:t>
+            </a:r>
+          </a:p>
+        </p:txBody>
+      </p:sp>
     </p:spTree>
   </p:cSld>
   <p:clrMapOvr>
@@ -11023,6 +11303,46 @@
           </a:p>
         </p:txBody>
       </p:sp>
+      <p:sp>
+        <p:nvSpPr>
+          <p:cNvPr id="35" name="ZoneTexte 34">
+            <a:extLst>
+              <a:ext uri="{FF2B5EF4-FFF2-40B4-BE49-F238E27FC236}">
+                <a16:creationId xmlns:a16="http://schemas.microsoft.com/office/drawing/2014/main" id="{8A25A8DC-9B75-CBB6-1DB6-74A7BEFBE2ED}"/>
+              </a:ext>
+            </a:extLst>
+          </p:cNvPr>
+          <p:cNvSpPr txBox="1"/>
+          <p:nvPr/>
+        </p:nvSpPr>
+        <p:spPr>
+          <a:xfrm>
+            <a:off x="0" y="4864100"/>
+            <a:ext cx="9144000" cy="230832"/>
+          </a:xfrm>
+          <a:prstGeom prst="rect">
+            <a:avLst/>
+          </a:prstGeom>
+          <a:noFill/>
+        </p:spPr>
+        <p:txBody>
+          <a:bodyPr vert="horz" rtlCol="0">
+            <a:spAutoFit/>
+          </a:bodyPr>
+          <a:lstStyle/>
+          <a:p>
+            <a:pPr algn="ctr"/>
+            <a:r>
+              <a:rPr lang="fr-FR" sz="900">
+                <a:solidFill>
+                  <a:srgbClr val="B4B4B4"/>
+                </a:solidFill>
+              </a:rPr>
+              <a:t>(c) titi_23 - mediateur-numerique.github.io - Reproduction interdite sans autorisation</a:t>
+            </a:r>
+          </a:p>
+        </p:txBody>
+      </p:sp>
     </p:spTree>
   </p:cSld>
   <p:clrMapOvr>
@@ -11429,6 +11749,46 @@
           </a:p>
         </p:txBody>
       </p:sp>
+      <p:sp>
+        <p:nvSpPr>
+          <p:cNvPr id="12" name="ZoneTexte 11">
+            <a:extLst>
+              <a:ext uri="{FF2B5EF4-FFF2-40B4-BE49-F238E27FC236}">
+                <a16:creationId xmlns:a16="http://schemas.microsoft.com/office/drawing/2014/main" id="{9F0F09ED-21D6-400E-9204-5407DC34B557}"/>
+              </a:ext>
+            </a:extLst>
+          </p:cNvPr>
+          <p:cNvSpPr txBox="1"/>
+          <p:nvPr/>
+        </p:nvSpPr>
+        <p:spPr>
+          <a:xfrm>
+            <a:off x="0" y="4864100"/>
+            <a:ext cx="9144000" cy="230832"/>
+          </a:xfrm>
+          <a:prstGeom prst="rect">
+            <a:avLst/>
+          </a:prstGeom>
+          <a:noFill/>
+        </p:spPr>
+        <p:txBody>
+          <a:bodyPr vert="horz" rtlCol="0">
+            <a:spAutoFit/>
+          </a:bodyPr>
+          <a:lstStyle/>
+          <a:p>
+            <a:pPr algn="ctr"/>
+            <a:r>
+              <a:rPr lang="fr-FR" sz="900">
+                <a:solidFill>
+                  <a:srgbClr val="B4B4B4"/>
+                </a:solidFill>
+              </a:rPr>
+              <a:t>(c) titi_23 - mediateur-numerique.github.io - Reproduction interdite sans autorisation</a:t>
+            </a:r>
+          </a:p>
+        </p:txBody>
+      </p:sp>
     </p:spTree>
   </p:cSld>
   <p:clrMapOvr>
@@ -12677,6 +13037,46 @@
           </a:p>
         </p:txBody>
       </p:sp>
+      <p:sp>
+        <p:nvSpPr>
+          <p:cNvPr id="35" name="ZoneTexte 34">
+            <a:extLst>
+              <a:ext uri="{FF2B5EF4-FFF2-40B4-BE49-F238E27FC236}">
+                <a16:creationId xmlns:a16="http://schemas.microsoft.com/office/drawing/2014/main" id="{D07E3AD0-E2EB-B7F7-8E61-963F2F9341FB}"/>
+              </a:ext>
+            </a:extLst>
+          </p:cNvPr>
+          <p:cNvSpPr txBox="1"/>
+          <p:nvPr/>
+        </p:nvSpPr>
+        <p:spPr>
+          <a:xfrm>
+            <a:off x="0" y="4864100"/>
+            <a:ext cx="9144000" cy="230832"/>
+          </a:xfrm>
+          <a:prstGeom prst="rect">
+            <a:avLst/>
+          </a:prstGeom>
+          <a:noFill/>
+        </p:spPr>
+        <p:txBody>
+          <a:bodyPr vert="horz" rtlCol="0">
+            <a:spAutoFit/>
+          </a:bodyPr>
+          <a:lstStyle/>
+          <a:p>
+            <a:pPr algn="ctr"/>
+            <a:r>
+              <a:rPr lang="fr-FR" sz="900">
+                <a:solidFill>
+                  <a:srgbClr val="B4B4B4"/>
+                </a:solidFill>
+              </a:rPr>
+              <a:t>(c) titi_23 - mediateur-numerique.github.io - Reproduction interdite sans autorisation</a:t>
+            </a:r>
+          </a:p>
+        </p:txBody>
+      </p:sp>
     </p:spTree>
   </p:cSld>
   <p:clrMapOvr>
@@ -14441,6 +14841,46 @@
           </a:p>
         </p:txBody>
       </p:sp>
+      <p:sp>
+        <p:nvSpPr>
+          <p:cNvPr id="48" name="ZoneTexte 47">
+            <a:extLst>
+              <a:ext uri="{FF2B5EF4-FFF2-40B4-BE49-F238E27FC236}">
+                <a16:creationId xmlns:a16="http://schemas.microsoft.com/office/drawing/2014/main" id="{F7B16318-FBBB-C8D7-2F30-B4CAA83FF889}"/>
+              </a:ext>
+            </a:extLst>
+          </p:cNvPr>
+          <p:cNvSpPr txBox="1"/>
+          <p:nvPr/>
+        </p:nvSpPr>
+        <p:spPr>
+          <a:xfrm>
+            <a:off x="0" y="4864100"/>
+            <a:ext cx="9144000" cy="230832"/>
+          </a:xfrm>
+          <a:prstGeom prst="rect">
+            <a:avLst/>
+          </a:prstGeom>
+          <a:noFill/>
+        </p:spPr>
+        <p:txBody>
+          <a:bodyPr vert="horz" rtlCol="0">
+            <a:spAutoFit/>
+          </a:bodyPr>
+          <a:lstStyle/>
+          <a:p>
+            <a:pPr algn="ctr"/>
+            <a:r>
+              <a:rPr lang="fr-FR" sz="900">
+                <a:solidFill>
+                  <a:srgbClr val="B4B4B4"/>
+                </a:solidFill>
+              </a:rPr>
+              <a:t>(c) titi_23 - mediateur-numerique.github.io - Reproduction interdite sans autorisation</a:t>
+            </a:r>
+          </a:p>
+        </p:txBody>
+      </p:sp>
     </p:spTree>
   </p:cSld>
   <p:clrMapOvr>
@@ -16510,6 +16950,46 @@
           </a:p>
         </p:txBody>
       </p:sp>
+      <p:sp>
+        <p:nvSpPr>
+          <p:cNvPr id="56" name="ZoneTexte 55">
+            <a:extLst>
+              <a:ext uri="{FF2B5EF4-FFF2-40B4-BE49-F238E27FC236}">
+                <a16:creationId xmlns:a16="http://schemas.microsoft.com/office/drawing/2014/main" id="{255EC17D-1988-BFE5-5297-BFC66F0B9AF3}"/>
+              </a:ext>
+            </a:extLst>
+          </p:cNvPr>
+          <p:cNvSpPr txBox="1"/>
+          <p:nvPr/>
+        </p:nvSpPr>
+        <p:spPr>
+          <a:xfrm>
+            <a:off x="0" y="4864100"/>
+            <a:ext cx="9144000" cy="230832"/>
+          </a:xfrm>
+          <a:prstGeom prst="rect">
+            <a:avLst/>
+          </a:prstGeom>
+          <a:noFill/>
+        </p:spPr>
+        <p:txBody>
+          <a:bodyPr vert="horz" rtlCol="0">
+            <a:spAutoFit/>
+          </a:bodyPr>
+          <a:lstStyle/>
+          <a:p>
+            <a:pPr algn="ctr"/>
+            <a:r>
+              <a:rPr lang="fr-FR" sz="900">
+                <a:solidFill>
+                  <a:srgbClr val="B4B4B4"/>
+                </a:solidFill>
+              </a:rPr>
+              <a:t>(c) titi_23 - mediateur-numerique.github.io - Reproduction interdite sans autorisation</a:t>
+            </a:r>
+          </a:p>
+        </p:txBody>
+      </p:sp>
     </p:spTree>
   </p:cSld>
   <p:clrMapOvr>
@@ -16984,6 +17464,46 @@
           </a:p>
         </p:txBody>
       </p:sp>
+      <p:sp>
+        <p:nvSpPr>
+          <p:cNvPr id="14" name="ZoneTexte 13">
+            <a:extLst>
+              <a:ext uri="{FF2B5EF4-FFF2-40B4-BE49-F238E27FC236}">
+                <a16:creationId xmlns:a16="http://schemas.microsoft.com/office/drawing/2014/main" id="{3615D096-0066-EA7C-73C6-60503FC74B71}"/>
+              </a:ext>
+            </a:extLst>
+          </p:cNvPr>
+          <p:cNvSpPr txBox="1"/>
+          <p:nvPr/>
+        </p:nvSpPr>
+        <p:spPr>
+          <a:xfrm>
+            <a:off x="0" y="4864100"/>
+            <a:ext cx="9144000" cy="230832"/>
+          </a:xfrm>
+          <a:prstGeom prst="rect">
+            <a:avLst/>
+          </a:prstGeom>
+          <a:noFill/>
+        </p:spPr>
+        <p:txBody>
+          <a:bodyPr vert="horz" rtlCol="0">
+            <a:spAutoFit/>
+          </a:bodyPr>
+          <a:lstStyle/>
+          <a:p>
+            <a:pPr algn="ctr"/>
+            <a:r>
+              <a:rPr lang="fr-FR" sz="900">
+                <a:solidFill>
+                  <a:srgbClr val="B4B4B4"/>
+                </a:solidFill>
+              </a:rPr>
+              <a:t>(c) titi_23 - mediateur-numerique.github.io - Reproduction interdite sans autorisation</a:t>
+            </a:r>
+          </a:p>
+        </p:txBody>
+      </p:sp>
     </p:spTree>
   </p:cSld>
   <p:clrMapOvr>
@@ -17559,6 +18079,46 @@
           </a:p>
         </p:txBody>
       </p:sp>
+      <p:sp>
+        <p:nvSpPr>
+          <p:cNvPr id="16" name="ZoneTexte 15">
+            <a:extLst>
+              <a:ext uri="{FF2B5EF4-FFF2-40B4-BE49-F238E27FC236}">
+                <a16:creationId xmlns:a16="http://schemas.microsoft.com/office/drawing/2014/main" id="{9B6A352A-9BEE-1F3E-217D-2BFC3BA72F1B}"/>
+              </a:ext>
+            </a:extLst>
+          </p:cNvPr>
+          <p:cNvSpPr txBox="1"/>
+          <p:nvPr/>
+        </p:nvSpPr>
+        <p:spPr>
+          <a:xfrm>
+            <a:off x="0" y="4864100"/>
+            <a:ext cx="9144000" cy="230832"/>
+          </a:xfrm>
+          <a:prstGeom prst="rect">
+            <a:avLst/>
+          </a:prstGeom>
+          <a:noFill/>
+        </p:spPr>
+        <p:txBody>
+          <a:bodyPr vert="horz" rtlCol="0">
+            <a:spAutoFit/>
+          </a:bodyPr>
+          <a:lstStyle/>
+          <a:p>
+            <a:pPr algn="ctr"/>
+            <a:r>
+              <a:rPr lang="fr-FR" sz="900">
+                <a:solidFill>
+                  <a:srgbClr val="B4B4B4"/>
+                </a:solidFill>
+              </a:rPr>
+              <a:t>(c) titi_23 - mediateur-numerique.github.io - Reproduction interdite sans autorisation</a:t>
+            </a:r>
+          </a:p>
+        </p:txBody>
+      </p:sp>
     </p:spTree>
   </p:cSld>
   <p:clrMapOvr>
@@ -17969,6 +18529,46 @@
           </a:p>
         </p:txBody>
       </p:sp>
+      <p:sp>
+        <p:nvSpPr>
+          <p:cNvPr id="12" name="ZoneTexte 11">
+            <a:extLst>
+              <a:ext uri="{FF2B5EF4-FFF2-40B4-BE49-F238E27FC236}">
+                <a16:creationId xmlns:a16="http://schemas.microsoft.com/office/drawing/2014/main" id="{F386961D-65BE-4F40-09E8-0394E12160D3}"/>
+              </a:ext>
+            </a:extLst>
+          </p:cNvPr>
+          <p:cNvSpPr txBox="1"/>
+          <p:nvPr/>
+        </p:nvSpPr>
+        <p:spPr>
+          <a:xfrm>
+            <a:off x="0" y="4864100"/>
+            <a:ext cx="9144000" cy="230832"/>
+          </a:xfrm>
+          <a:prstGeom prst="rect">
+            <a:avLst/>
+          </a:prstGeom>
+          <a:noFill/>
+        </p:spPr>
+        <p:txBody>
+          <a:bodyPr vert="horz" rtlCol="0">
+            <a:spAutoFit/>
+          </a:bodyPr>
+          <a:lstStyle/>
+          <a:p>
+            <a:pPr algn="ctr"/>
+            <a:r>
+              <a:rPr lang="fr-FR" sz="900">
+                <a:solidFill>
+                  <a:srgbClr val="B4B4B4"/>
+                </a:solidFill>
+              </a:rPr>
+              <a:t>(c) titi_23 - mediateur-numerique.github.io - Reproduction interdite sans autorisation</a:t>
+            </a:r>
+          </a:p>
+        </p:txBody>
+      </p:sp>
     </p:spTree>
   </p:cSld>
   <p:clrMapOvr>
@@ -18379,6 +18979,46 @@
           </a:p>
         </p:txBody>
       </p:sp>
+      <p:sp>
+        <p:nvSpPr>
+          <p:cNvPr id="12" name="ZoneTexte 11">
+            <a:extLst>
+              <a:ext uri="{FF2B5EF4-FFF2-40B4-BE49-F238E27FC236}">
+                <a16:creationId xmlns:a16="http://schemas.microsoft.com/office/drawing/2014/main" id="{7A94A2DF-7244-E041-37E1-8D91589E2008}"/>
+              </a:ext>
+            </a:extLst>
+          </p:cNvPr>
+          <p:cNvSpPr txBox="1"/>
+          <p:nvPr/>
+        </p:nvSpPr>
+        <p:spPr>
+          <a:xfrm>
+            <a:off x="0" y="4864100"/>
+            <a:ext cx="9144000" cy="230832"/>
+          </a:xfrm>
+          <a:prstGeom prst="rect">
+            <a:avLst/>
+          </a:prstGeom>
+          <a:noFill/>
+        </p:spPr>
+        <p:txBody>
+          <a:bodyPr vert="horz" rtlCol="0">
+            <a:spAutoFit/>
+          </a:bodyPr>
+          <a:lstStyle/>
+          <a:p>
+            <a:pPr algn="ctr"/>
+            <a:r>
+              <a:rPr lang="fr-FR" sz="900">
+                <a:solidFill>
+                  <a:srgbClr val="B4B4B4"/>
+                </a:solidFill>
+              </a:rPr>
+              <a:t>(c) titi_23 - mediateur-numerique.github.io - Reproduction interdite sans autorisation</a:t>
+            </a:r>
+          </a:p>
+        </p:txBody>
+      </p:sp>
     </p:spTree>
   </p:cSld>
   <p:clrMapOvr>
@@ -18789,6 +19429,46 @@
           </a:p>
         </p:txBody>
       </p:sp>
+      <p:sp>
+        <p:nvSpPr>
+          <p:cNvPr id="12" name="ZoneTexte 11">
+            <a:extLst>
+              <a:ext uri="{FF2B5EF4-FFF2-40B4-BE49-F238E27FC236}">
+                <a16:creationId xmlns:a16="http://schemas.microsoft.com/office/drawing/2014/main" id="{B69CA687-83E3-C4DF-CD37-7F5E4F0B86B0}"/>
+              </a:ext>
+            </a:extLst>
+          </p:cNvPr>
+          <p:cNvSpPr txBox="1"/>
+          <p:nvPr/>
+        </p:nvSpPr>
+        <p:spPr>
+          <a:xfrm>
+            <a:off x="0" y="4864100"/>
+            <a:ext cx="9144000" cy="230832"/>
+          </a:xfrm>
+          <a:prstGeom prst="rect">
+            <a:avLst/>
+          </a:prstGeom>
+          <a:noFill/>
+        </p:spPr>
+        <p:txBody>
+          <a:bodyPr vert="horz" rtlCol="0">
+            <a:spAutoFit/>
+          </a:bodyPr>
+          <a:lstStyle/>
+          <a:p>
+            <a:pPr algn="ctr"/>
+            <a:r>
+              <a:rPr lang="fr-FR" sz="900">
+                <a:solidFill>
+                  <a:srgbClr val="B4B4B4"/>
+                </a:solidFill>
+              </a:rPr>
+              <a:t>(c) titi_23 - mediateur-numerique.github.io - Reproduction interdite sans autorisation</a:t>
+            </a:r>
+          </a:p>
+        </p:txBody>
+      </p:sp>
     </p:spTree>
   </p:cSld>
   <p:clrMapOvr>
@@ -19364,6 +20044,46 @@
           </a:p>
         </p:txBody>
       </p:sp>
+      <p:sp>
+        <p:nvSpPr>
+          <p:cNvPr id="16" name="ZoneTexte 15">
+            <a:extLst>
+              <a:ext uri="{FF2B5EF4-FFF2-40B4-BE49-F238E27FC236}">
+                <a16:creationId xmlns:a16="http://schemas.microsoft.com/office/drawing/2014/main" id="{F6BAF623-9C70-1F7C-A3AF-ED8B566B26C3}"/>
+              </a:ext>
+            </a:extLst>
+          </p:cNvPr>
+          <p:cNvSpPr txBox="1"/>
+          <p:nvPr/>
+        </p:nvSpPr>
+        <p:spPr>
+          <a:xfrm>
+            <a:off x="0" y="4864100"/>
+            <a:ext cx="9144000" cy="230832"/>
+          </a:xfrm>
+          <a:prstGeom prst="rect">
+            <a:avLst/>
+          </a:prstGeom>
+          <a:noFill/>
+        </p:spPr>
+        <p:txBody>
+          <a:bodyPr vert="horz" rtlCol="0">
+            <a:spAutoFit/>
+          </a:bodyPr>
+          <a:lstStyle/>
+          <a:p>
+            <a:pPr algn="ctr"/>
+            <a:r>
+              <a:rPr lang="fr-FR" sz="900">
+                <a:solidFill>
+                  <a:srgbClr val="B4B4B4"/>
+                </a:solidFill>
+              </a:rPr>
+              <a:t>(c) titi_23 - mediateur-numerique.github.io - Reproduction interdite sans autorisation</a:t>
+            </a:r>
+          </a:p>
+        </p:txBody>
+      </p:sp>
     </p:spTree>
   </p:cSld>
   <p:clrMapOvr>
@@ -19774,6 +20494,46 @@
           </a:p>
         </p:txBody>
       </p:sp>
+      <p:sp>
+        <p:nvSpPr>
+          <p:cNvPr id="12" name="ZoneTexte 11">
+            <a:extLst>
+              <a:ext uri="{FF2B5EF4-FFF2-40B4-BE49-F238E27FC236}">
+                <a16:creationId xmlns:a16="http://schemas.microsoft.com/office/drawing/2014/main" id="{59AD2988-73D1-3589-DA0E-CE9F25B38197}"/>
+              </a:ext>
+            </a:extLst>
+          </p:cNvPr>
+          <p:cNvSpPr txBox="1"/>
+          <p:nvPr/>
+        </p:nvSpPr>
+        <p:spPr>
+          <a:xfrm>
+            <a:off x="0" y="4864100"/>
+            <a:ext cx="9144000" cy="230832"/>
+          </a:xfrm>
+          <a:prstGeom prst="rect">
+            <a:avLst/>
+          </a:prstGeom>
+          <a:noFill/>
+        </p:spPr>
+        <p:txBody>
+          <a:bodyPr vert="horz" rtlCol="0">
+            <a:spAutoFit/>
+          </a:bodyPr>
+          <a:lstStyle/>
+          <a:p>
+            <a:pPr algn="ctr"/>
+            <a:r>
+              <a:rPr lang="fr-FR" sz="900">
+                <a:solidFill>
+                  <a:srgbClr val="B4B4B4"/>
+                </a:solidFill>
+              </a:rPr>
+              <a:t>(c) titi_23 - mediateur-numerique.github.io - Reproduction interdite sans autorisation</a:t>
+            </a:r>
+          </a:p>
+        </p:txBody>
+      </p:sp>
     </p:spTree>
   </p:cSld>
   <p:clrMapOvr>
@@ -20184,6 +20944,46 @@
           </a:p>
         </p:txBody>
       </p:sp>
+      <p:sp>
+        <p:nvSpPr>
+          <p:cNvPr id="12" name="ZoneTexte 11">
+            <a:extLst>
+              <a:ext uri="{FF2B5EF4-FFF2-40B4-BE49-F238E27FC236}">
+                <a16:creationId xmlns:a16="http://schemas.microsoft.com/office/drawing/2014/main" id="{DA46B41E-1F1C-F1B4-A214-D94A5868722C}"/>
+              </a:ext>
+            </a:extLst>
+          </p:cNvPr>
+          <p:cNvSpPr txBox="1"/>
+          <p:nvPr/>
+        </p:nvSpPr>
+        <p:spPr>
+          <a:xfrm>
+            <a:off x="0" y="4864100"/>
+            <a:ext cx="9144000" cy="230832"/>
+          </a:xfrm>
+          <a:prstGeom prst="rect">
+            <a:avLst/>
+          </a:prstGeom>
+          <a:noFill/>
+        </p:spPr>
+        <p:txBody>
+          <a:bodyPr vert="horz" rtlCol="0">
+            <a:spAutoFit/>
+          </a:bodyPr>
+          <a:lstStyle/>
+          <a:p>
+            <a:pPr algn="ctr"/>
+            <a:r>
+              <a:rPr lang="fr-FR" sz="900">
+                <a:solidFill>
+                  <a:srgbClr val="B4B4B4"/>
+                </a:solidFill>
+              </a:rPr>
+              <a:t>(c) titi_23 - mediateur-numerique.github.io - Reproduction interdite sans autorisation</a:t>
+            </a:r>
+          </a:p>
+        </p:txBody>
+      </p:sp>
     </p:spTree>
   </p:cSld>
   <p:clrMapOvr>
@@ -20594,6 +21394,46 @@
           </a:p>
         </p:txBody>
       </p:sp>
+      <p:sp>
+        <p:nvSpPr>
+          <p:cNvPr id="12" name="ZoneTexte 11">
+            <a:extLst>
+              <a:ext uri="{FF2B5EF4-FFF2-40B4-BE49-F238E27FC236}">
+                <a16:creationId xmlns:a16="http://schemas.microsoft.com/office/drawing/2014/main" id="{576E46AF-8CB7-F208-CD26-9058E348C955}"/>
+              </a:ext>
+            </a:extLst>
+          </p:cNvPr>
+          <p:cNvSpPr txBox="1"/>
+          <p:nvPr/>
+        </p:nvSpPr>
+        <p:spPr>
+          <a:xfrm>
+            <a:off x="0" y="4864100"/>
+            <a:ext cx="9144000" cy="230832"/>
+          </a:xfrm>
+          <a:prstGeom prst="rect">
+            <a:avLst/>
+          </a:prstGeom>
+          <a:noFill/>
+        </p:spPr>
+        <p:txBody>
+          <a:bodyPr vert="horz" rtlCol="0">
+            <a:spAutoFit/>
+          </a:bodyPr>
+          <a:lstStyle/>
+          <a:p>
+            <a:pPr algn="ctr"/>
+            <a:r>
+              <a:rPr lang="fr-FR" sz="900">
+                <a:solidFill>
+                  <a:srgbClr val="B4B4B4"/>
+                </a:solidFill>
+              </a:rPr>
+              <a:t>(c) titi_23 - mediateur-numerique.github.io - Reproduction interdite sans autorisation</a:t>
+            </a:r>
+          </a:p>
+        </p:txBody>
+      </p:sp>
     </p:spTree>
   </p:cSld>
   <p:clrMapOvr>
@@ -21169,6 +22009,46 @@
           </a:p>
         </p:txBody>
       </p:sp>
+      <p:sp>
+        <p:nvSpPr>
+          <p:cNvPr id="16" name="ZoneTexte 15">
+            <a:extLst>
+              <a:ext uri="{FF2B5EF4-FFF2-40B4-BE49-F238E27FC236}">
+                <a16:creationId xmlns:a16="http://schemas.microsoft.com/office/drawing/2014/main" id="{913D7509-9785-37FB-24AF-0334E15C5C6B}"/>
+              </a:ext>
+            </a:extLst>
+          </p:cNvPr>
+          <p:cNvSpPr txBox="1"/>
+          <p:nvPr/>
+        </p:nvSpPr>
+        <p:spPr>
+          <a:xfrm>
+            <a:off x="0" y="4864100"/>
+            <a:ext cx="9144000" cy="230832"/>
+          </a:xfrm>
+          <a:prstGeom prst="rect">
+            <a:avLst/>
+          </a:prstGeom>
+          <a:noFill/>
+        </p:spPr>
+        <p:txBody>
+          <a:bodyPr vert="horz" rtlCol="0">
+            <a:spAutoFit/>
+          </a:bodyPr>
+          <a:lstStyle/>
+          <a:p>
+            <a:pPr algn="ctr"/>
+            <a:r>
+              <a:rPr lang="fr-FR" sz="900">
+                <a:solidFill>
+                  <a:srgbClr val="B4B4B4"/>
+                </a:solidFill>
+              </a:rPr>
+              <a:t>(c) titi_23 - mediateur-numerique.github.io - Reproduction interdite sans autorisation</a:t>
+            </a:r>
+          </a:p>
+        </p:txBody>
+      </p:sp>
     </p:spTree>
   </p:cSld>
   <p:clrMapOvr>
@@ -23917,6 +24797,46 @@
           </a:p>
         </p:txBody>
       </p:sp>
+      <p:sp>
+        <p:nvSpPr>
+          <p:cNvPr id="81" name="ZoneTexte 80">
+            <a:extLst>
+              <a:ext uri="{FF2B5EF4-FFF2-40B4-BE49-F238E27FC236}">
+                <a16:creationId xmlns:a16="http://schemas.microsoft.com/office/drawing/2014/main" id="{FCCD6DB1-6E17-37C1-C7A0-6073D59492C1}"/>
+              </a:ext>
+            </a:extLst>
+          </p:cNvPr>
+          <p:cNvSpPr txBox="1"/>
+          <p:nvPr/>
+        </p:nvSpPr>
+        <p:spPr>
+          <a:xfrm>
+            <a:off x="0" y="4864100"/>
+            <a:ext cx="9144000" cy="230832"/>
+          </a:xfrm>
+          <a:prstGeom prst="rect">
+            <a:avLst/>
+          </a:prstGeom>
+          <a:noFill/>
+        </p:spPr>
+        <p:txBody>
+          <a:bodyPr vert="horz" rtlCol="0">
+            <a:spAutoFit/>
+          </a:bodyPr>
+          <a:lstStyle/>
+          <a:p>
+            <a:pPr algn="ctr"/>
+            <a:r>
+              <a:rPr lang="fr-FR" sz="900">
+                <a:solidFill>
+                  <a:srgbClr val="B4B4B4"/>
+                </a:solidFill>
+              </a:rPr>
+              <a:t>(c) titi_23 - mediateur-numerique.github.io - Reproduction interdite sans autorisation</a:t>
+            </a:r>
+          </a:p>
+        </p:txBody>
+      </p:sp>
     </p:spTree>
   </p:cSld>
   <p:clrMapOvr>
@@ -24327,6 +25247,46 @@
           </a:p>
         </p:txBody>
       </p:sp>
+      <p:sp>
+        <p:nvSpPr>
+          <p:cNvPr id="12" name="ZoneTexte 11">
+            <a:extLst>
+              <a:ext uri="{FF2B5EF4-FFF2-40B4-BE49-F238E27FC236}">
+                <a16:creationId xmlns:a16="http://schemas.microsoft.com/office/drawing/2014/main" id="{473A8EE3-D4E3-CD74-161C-A1578AEA7D76}"/>
+              </a:ext>
+            </a:extLst>
+          </p:cNvPr>
+          <p:cNvSpPr txBox="1"/>
+          <p:nvPr/>
+        </p:nvSpPr>
+        <p:spPr>
+          <a:xfrm>
+            <a:off x="0" y="4864100"/>
+            <a:ext cx="9144000" cy="230832"/>
+          </a:xfrm>
+          <a:prstGeom prst="rect">
+            <a:avLst/>
+          </a:prstGeom>
+          <a:noFill/>
+        </p:spPr>
+        <p:txBody>
+          <a:bodyPr vert="horz" rtlCol="0">
+            <a:spAutoFit/>
+          </a:bodyPr>
+          <a:lstStyle/>
+          <a:p>
+            <a:pPr algn="ctr"/>
+            <a:r>
+              <a:rPr lang="fr-FR" sz="900">
+                <a:solidFill>
+                  <a:srgbClr val="B4B4B4"/>
+                </a:solidFill>
+              </a:rPr>
+              <a:t>(c) titi_23 - mediateur-numerique.github.io - Reproduction interdite sans autorisation</a:t>
+            </a:r>
+          </a:p>
+        </p:txBody>
+      </p:sp>
     </p:spTree>
   </p:cSld>
   <p:clrMapOvr>
@@ -24737,6 +25697,46 @@
           </a:p>
         </p:txBody>
       </p:sp>
+      <p:sp>
+        <p:nvSpPr>
+          <p:cNvPr id="12" name="ZoneTexte 11">
+            <a:extLst>
+              <a:ext uri="{FF2B5EF4-FFF2-40B4-BE49-F238E27FC236}">
+                <a16:creationId xmlns:a16="http://schemas.microsoft.com/office/drawing/2014/main" id="{5EB67972-35B9-F802-F82F-F399DE67EE25}"/>
+              </a:ext>
+            </a:extLst>
+          </p:cNvPr>
+          <p:cNvSpPr txBox="1"/>
+          <p:nvPr/>
+        </p:nvSpPr>
+        <p:spPr>
+          <a:xfrm>
+            <a:off x="0" y="4864100"/>
+            <a:ext cx="9144000" cy="230832"/>
+          </a:xfrm>
+          <a:prstGeom prst="rect">
+            <a:avLst/>
+          </a:prstGeom>
+          <a:noFill/>
+        </p:spPr>
+        <p:txBody>
+          <a:bodyPr vert="horz" rtlCol="0">
+            <a:spAutoFit/>
+          </a:bodyPr>
+          <a:lstStyle/>
+          <a:p>
+            <a:pPr algn="ctr"/>
+            <a:r>
+              <a:rPr lang="fr-FR" sz="900">
+                <a:solidFill>
+                  <a:srgbClr val="B4B4B4"/>
+                </a:solidFill>
+              </a:rPr>
+              <a:t>(c) titi_23 - mediateur-numerique.github.io - Reproduction interdite sans autorisation</a:t>
+            </a:r>
+          </a:p>
+        </p:txBody>
+      </p:sp>
     </p:spTree>
   </p:cSld>
   <p:clrMapOvr>
@@ -25147,6 +26147,46 @@
           </a:p>
         </p:txBody>
       </p:sp>
+      <p:sp>
+        <p:nvSpPr>
+          <p:cNvPr id="12" name="ZoneTexte 11">
+            <a:extLst>
+              <a:ext uri="{FF2B5EF4-FFF2-40B4-BE49-F238E27FC236}">
+                <a16:creationId xmlns:a16="http://schemas.microsoft.com/office/drawing/2014/main" id="{D7D7BF39-ED4C-DF5B-906F-36859889F643}"/>
+              </a:ext>
+            </a:extLst>
+          </p:cNvPr>
+          <p:cNvSpPr txBox="1"/>
+          <p:nvPr/>
+        </p:nvSpPr>
+        <p:spPr>
+          <a:xfrm>
+            <a:off x="0" y="4864100"/>
+            <a:ext cx="9144000" cy="230832"/>
+          </a:xfrm>
+          <a:prstGeom prst="rect">
+            <a:avLst/>
+          </a:prstGeom>
+          <a:noFill/>
+        </p:spPr>
+        <p:txBody>
+          <a:bodyPr vert="horz" rtlCol="0">
+            <a:spAutoFit/>
+          </a:bodyPr>
+          <a:lstStyle/>
+          <a:p>
+            <a:pPr algn="ctr"/>
+            <a:r>
+              <a:rPr lang="fr-FR" sz="900">
+                <a:solidFill>
+                  <a:srgbClr val="B4B4B4"/>
+                </a:solidFill>
+              </a:rPr>
+              <a:t>(c) titi_23 - mediateur-numerique.github.io - Reproduction interdite sans autorisation</a:t>
+            </a:r>
+          </a:p>
+        </p:txBody>
+      </p:sp>
     </p:spTree>
   </p:cSld>
   <p:clrMapOvr>
@@ -25722,6 +26762,46 @@
           </a:p>
         </p:txBody>
       </p:sp>
+      <p:sp>
+        <p:nvSpPr>
+          <p:cNvPr id="16" name="ZoneTexte 15">
+            <a:extLst>
+              <a:ext uri="{FF2B5EF4-FFF2-40B4-BE49-F238E27FC236}">
+                <a16:creationId xmlns:a16="http://schemas.microsoft.com/office/drawing/2014/main" id="{5EF3E655-4787-4D35-256F-7B0BC6B05C2C}"/>
+              </a:ext>
+            </a:extLst>
+          </p:cNvPr>
+          <p:cNvSpPr txBox="1"/>
+          <p:nvPr/>
+        </p:nvSpPr>
+        <p:spPr>
+          <a:xfrm>
+            <a:off x="0" y="4864100"/>
+            <a:ext cx="9144000" cy="230832"/>
+          </a:xfrm>
+          <a:prstGeom prst="rect">
+            <a:avLst/>
+          </a:prstGeom>
+          <a:noFill/>
+        </p:spPr>
+        <p:txBody>
+          <a:bodyPr vert="horz" rtlCol="0">
+            <a:spAutoFit/>
+          </a:bodyPr>
+          <a:lstStyle/>
+          <a:p>
+            <a:pPr algn="ctr"/>
+            <a:r>
+              <a:rPr lang="fr-FR" sz="900">
+                <a:solidFill>
+                  <a:srgbClr val="B4B4B4"/>
+                </a:solidFill>
+              </a:rPr>
+              <a:t>(c) titi_23 - mediateur-numerique.github.io - Reproduction interdite sans autorisation</a:t>
+            </a:r>
+          </a:p>
+        </p:txBody>
+      </p:sp>
     </p:spTree>
   </p:cSld>
   <p:clrMapOvr>
@@ -26132,6 +27212,46 @@
           </a:p>
         </p:txBody>
       </p:sp>
+      <p:sp>
+        <p:nvSpPr>
+          <p:cNvPr id="12" name="ZoneTexte 11">
+            <a:extLst>
+              <a:ext uri="{FF2B5EF4-FFF2-40B4-BE49-F238E27FC236}">
+                <a16:creationId xmlns:a16="http://schemas.microsoft.com/office/drawing/2014/main" id="{9157A3EA-48B0-253B-0FFA-00EFC48323E4}"/>
+              </a:ext>
+            </a:extLst>
+          </p:cNvPr>
+          <p:cNvSpPr txBox="1"/>
+          <p:nvPr/>
+        </p:nvSpPr>
+        <p:spPr>
+          <a:xfrm>
+            <a:off x="0" y="4864100"/>
+            <a:ext cx="9144000" cy="230832"/>
+          </a:xfrm>
+          <a:prstGeom prst="rect">
+            <a:avLst/>
+          </a:prstGeom>
+          <a:noFill/>
+        </p:spPr>
+        <p:txBody>
+          <a:bodyPr vert="horz" rtlCol="0">
+            <a:spAutoFit/>
+          </a:bodyPr>
+          <a:lstStyle/>
+          <a:p>
+            <a:pPr algn="ctr"/>
+            <a:r>
+              <a:rPr lang="fr-FR" sz="900">
+                <a:solidFill>
+                  <a:srgbClr val="B4B4B4"/>
+                </a:solidFill>
+              </a:rPr>
+              <a:t>(c) titi_23 - mediateur-numerique.github.io - Reproduction interdite sans autorisation</a:t>
+            </a:r>
+          </a:p>
+        </p:txBody>
+      </p:sp>
     </p:spTree>
   </p:cSld>
   <p:clrMapOvr>
@@ -26542,6 +27662,46 @@
           </a:p>
         </p:txBody>
       </p:sp>
+      <p:sp>
+        <p:nvSpPr>
+          <p:cNvPr id="12" name="ZoneTexte 11">
+            <a:extLst>
+              <a:ext uri="{FF2B5EF4-FFF2-40B4-BE49-F238E27FC236}">
+                <a16:creationId xmlns:a16="http://schemas.microsoft.com/office/drawing/2014/main" id="{C1293707-DFCD-210E-4D34-F044578F57AF}"/>
+              </a:ext>
+            </a:extLst>
+          </p:cNvPr>
+          <p:cNvSpPr txBox="1"/>
+          <p:nvPr/>
+        </p:nvSpPr>
+        <p:spPr>
+          <a:xfrm>
+            <a:off x="0" y="4864100"/>
+            <a:ext cx="9144000" cy="230832"/>
+          </a:xfrm>
+          <a:prstGeom prst="rect">
+            <a:avLst/>
+          </a:prstGeom>
+          <a:noFill/>
+        </p:spPr>
+        <p:txBody>
+          <a:bodyPr vert="horz" rtlCol="0">
+            <a:spAutoFit/>
+          </a:bodyPr>
+          <a:lstStyle/>
+          <a:p>
+            <a:pPr algn="ctr"/>
+            <a:r>
+              <a:rPr lang="fr-FR" sz="900">
+                <a:solidFill>
+                  <a:srgbClr val="B4B4B4"/>
+                </a:solidFill>
+              </a:rPr>
+              <a:t>(c) titi_23 - mediateur-numerique.github.io - Reproduction interdite sans autorisation</a:t>
+            </a:r>
+          </a:p>
+        </p:txBody>
+      </p:sp>
     </p:spTree>
   </p:cSld>
   <p:clrMapOvr>
@@ -26952,6 +28112,46 @@
           </a:p>
         </p:txBody>
       </p:sp>
+      <p:sp>
+        <p:nvSpPr>
+          <p:cNvPr id="12" name="ZoneTexte 11">
+            <a:extLst>
+              <a:ext uri="{FF2B5EF4-FFF2-40B4-BE49-F238E27FC236}">
+                <a16:creationId xmlns:a16="http://schemas.microsoft.com/office/drawing/2014/main" id="{E0133C1C-9801-62B4-FC9E-6F3205D32138}"/>
+              </a:ext>
+            </a:extLst>
+          </p:cNvPr>
+          <p:cNvSpPr txBox="1"/>
+          <p:nvPr/>
+        </p:nvSpPr>
+        <p:spPr>
+          <a:xfrm>
+            <a:off x="0" y="4864100"/>
+            <a:ext cx="9144000" cy="230832"/>
+          </a:xfrm>
+          <a:prstGeom prst="rect">
+            <a:avLst/>
+          </a:prstGeom>
+          <a:noFill/>
+        </p:spPr>
+        <p:txBody>
+          <a:bodyPr vert="horz" rtlCol="0">
+            <a:spAutoFit/>
+          </a:bodyPr>
+          <a:lstStyle/>
+          <a:p>
+            <a:pPr algn="ctr"/>
+            <a:r>
+              <a:rPr lang="fr-FR" sz="900">
+                <a:solidFill>
+                  <a:srgbClr val="B4B4B4"/>
+                </a:solidFill>
+              </a:rPr>
+              <a:t>(c) titi_23 - mediateur-numerique.github.io - Reproduction interdite sans autorisation</a:t>
+            </a:r>
+          </a:p>
+        </p:txBody>
+      </p:sp>
     </p:spTree>
   </p:cSld>
   <p:clrMapOvr>
@@ -27847,6 +29047,46 @@
           </a:p>
         </p:txBody>
       </p:sp>
+      <p:sp>
+        <p:nvSpPr>
+          <p:cNvPr id="25" name="ZoneTexte 24">
+            <a:extLst>
+              <a:ext uri="{FF2B5EF4-FFF2-40B4-BE49-F238E27FC236}">
+                <a16:creationId xmlns:a16="http://schemas.microsoft.com/office/drawing/2014/main" id="{4E153593-7BB2-D53D-8BF2-69C44E33DA33}"/>
+              </a:ext>
+            </a:extLst>
+          </p:cNvPr>
+          <p:cNvSpPr txBox="1"/>
+          <p:nvPr/>
+        </p:nvSpPr>
+        <p:spPr>
+          <a:xfrm>
+            <a:off x="0" y="4864100"/>
+            <a:ext cx="9144000" cy="230832"/>
+          </a:xfrm>
+          <a:prstGeom prst="rect">
+            <a:avLst/>
+          </a:prstGeom>
+          <a:noFill/>
+        </p:spPr>
+        <p:txBody>
+          <a:bodyPr vert="horz" rtlCol="0">
+            <a:spAutoFit/>
+          </a:bodyPr>
+          <a:lstStyle/>
+          <a:p>
+            <a:pPr algn="ctr"/>
+            <a:r>
+              <a:rPr lang="fr-FR" sz="900">
+                <a:solidFill>
+                  <a:srgbClr val="B4B4B4"/>
+                </a:solidFill>
+              </a:rPr>
+              <a:t>(c) titi_23 - mediateur-numerique.github.io - Reproduction interdite sans autorisation</a:t>
+            </a:r>
+          </a:p>
+        </p:txBody>
+      </p:sp>
     </p:spTree>
   </p:cSld>
   <p:clrMapOvr>
@@ -28629,6 +29869,46 @@
           </a:p>
         </p:txBody>
       </p:sp>
+      <p:sp>
+        <p:nvSpPr>
+          <p:cNvPr id="23" name="ZoneTexte 22">
+            <a:extLst>
+              <a:ext uri="{FF2B5EF4-FFF2-40B4-BE49-F238E27FC236}">
+                <a16:creationId xmlns:a16="http://schemas.microsoft.com/office/drawing/2014/main" id="{9ABB7175-89CB-B9A8-2682-9337D698F909}"/>
+              </a:ext>
+            </a:extLst>
+          </p:cNvPr>
+          <p:cNvSpPr txBox="1"/>
+          <p:nvPr/>
+        </p:nvSpPr>
+        <p:spPr>
+          <a:xfrm>
+            <a:off x="0" y="4864100"/>
+            <a:ext cx="9144000" cy="230832"/>
+          </a:xfrm>
+          <a:prstGeom prst="rect">
+            <a:avLst/>
+          </a:prstGeom>
+          <a:noFill/>
+        </p:spPr>
+        <p:txBody>
+          <a:bodyPr vert="horz" rtlCol="0">
+            <a:spAutoFit/>
+          </a:bodyPr>
+          <a:lstStyle/>
+          <a:p>
+            <a:pPr algn="ctr"/>
+            <a:r>
+              <a:rPr lang="fr-FR" sz="900">
+                <a:solidFill>
+                  <a:srgbClr val="B4B4B4"/>
+                </a:solidFill>
+              </a:rPr>
+              <a:t>(c) titi_23 - mediateur-numerique.github.io - Reproduction interdite sans autorisation</a:t>
+            </a:r>
+          </a:p>
+        </p:txBody>
+      </p:sp>
     </p:spTree>
   </p:cSld>
   <p:clrMapOvr>
@@ -28859,6 +30139,46 @@
           </a:p>
         </p:txBody>
       </p:sp>
+      <p:sp>
+        <p:nvSpPr>
+          <p:cNvPr id="6" name="ZoneTexte 5">
+            <a:extLst>
+              <a:ext uri="{FF2B5EF4-FFF2-40B4-BE49-F238E27FC236}">
+                <a16:creationId xmlns:a16="http://schemas.microsoft.com/office/drawing/2014/main" id="{CB1CD9B8-587F-2A8C-9C05-1828C16B7C67}"/>
+              </a:ext>
+            </a:extLst>
+          </p:cNvPr>
+          <p:cNvSpPr txBox="1"/>
+          <p:nvPr/>
+        </p:nvSpPr>
+        <p:spPr>
+          <a:xfrm>
+            <a:off x="0" y="4864100"/>
+            <a:ext cx="9144000" cy="230832"/>
+          </a:xfrm>
+          <a:prstGeom prst="rect">
+            <a:avLst/>
+          </a:prstGeom>
+          <a:noFill/>
+        </p:spPr>
+        <p:txBody>
+          <a:bodyPr vert="horz" rtlCol="0">
+            <a:spAutoFit/>
+          </a:bodyPr>
+          <a:lstStyle/>
+          <a:p>
+            <a:pPr algn="ctr"/>
+            <a:r>
+              <a:rPr lang="fr-FR" sz="900">
+                <a:solidFill>
+                  <a:srgbClr val="B4B4B4"/>
+                </a:solidFill>
+              </a:rPr>
+              <a:t>(c) titi_23 - mediateur-numerique.github.io - Reproduction interdite sans autorisation</a:t>
+            </a:r>
+          </a:p>
+        </p:txBody>
+      </p:sp>
     </p:spTree>
   </p:cSld>
   <p:clrMapOvr>
@@ -30556,6 +31876,46 @@
           </a:p>
         </p:txBody>
       </p:sp>
+      <p:sp>
+        <p:nvSpPr>
+          <p:cNvPr id="47" name="ZoneTexte 46">
+            <a:extLst>
+              <a:ext uri="{FF2B5EF4-FFF2-40B4-BE49-F238E27FC236}">
+                <a16:creationId xmlns:a16="http://schemas.microsoft.com/office/drawing/2014/main" id="{EAAED940-E978-1BA9-6F83-AE99301601A7}"/>
+              </a:ext>
+            </a:extLst>
+          </p:cNvPr>
+          <p:cNvSpPr txBox="1"/>
+          <p:nvPr/>
+        </p:nvSpPr>
+        <p:spPr>
+          <a:xfrm>
+            <a:off x="0" y="4864100"/>
+            <a:ext cx="9144000" cy="230832"/>
+          </a:xfrm>
+          <a:prstGeom prst="rect">
+            <a:avLst/>
+          </a:prstGeom>
+          <a:noFill/>
+        </p:spPr>
+        <p:txBody>
+          <a:bodyPr vert="horz" rtlCol="0">
+            <a:spAutoFit/>
+          </a:bodyPr>
+          <a:lstStyle/>
+          <a:p>
+            <a:pPr algn="ctr"/>
+            <a:r>
+              <a:rPr lang="fr-FR" sz="900">
+                <a:solidFill>
+                  <a:srgbClr val="B4B4B4"/>
+                </a:solidFill>
+              </a:rPr>
+              <a:t>(c) titi_23 - mediateur-numerique.github.io - Reproduction interdite sans autorisation</a:t>
+            </a:r>
+          </a:p>
+        </p:txBody>
+      </p:sp>
     </p:spTree>
   </p:cSld>
   <p:clrMapOvr>
@@ -32219,6 +33579,46 @@
           </a:p>
         </p:txBody>
       </p:sp>
+      <p:sp>
+        <p:nvSpPr>
+          <p:cNvPr id="3" name="ZoneTexte 2">
+            <a:extLst>
+              <a:ext uri="{FF2B5EF4-FFF2-40B4-BE49-F238E27FC236}">
+                <a16:creationId xmlns:a16="http://schemas.microsoft.com/office/drawing/2014/main" id="{12AFFFEF-E450-52CB-B7F3-A96FFE4AB472}"/>
+              </a:ext>
+            </a:extLst>
+          </p:cNvPr>
+          <p:cNvSpPr txBox="1"/>
+          <p:nvPr/>
+        </p:nvSpPr>
+        <p:spPr>
+          <a:xfrm>
+            <a:off x="0" y="4864100"/>
+            <a:ext cx="9144000" cy="230832"/>
+          </a:xfrm>
+          <a:prstGeom prst="rect">
+            <a:avLst/>
+          </a:prstGeom>
+          <a:noFill/>
+        </p:spPr>
+        <p:txBody>
+          <a:bodyPr vert="horz" rtlCol="0">
+            <a:spAutoFit/>
+          </a:bodyPr>
+          <a:lstStyle/>
+          <a:p>
+            <a:pPr algn="ctr"/>
+            <a:r>
+              <a:rPr lang="fr-FR" sz="900">
+                <a:solidFill>
+                  <a:srgbClr val="B4B4B4"/>
+                </a:solidFill>
+              </a:rPr>
+              <a:t>(c) titi_23 - mediateur-numerique.github.io - Reproduction interdite sans autorisation</a:t>
+            </a:r>
+          </a:p>
+        </p:txBody>
+      </p:sp>
     </p:spTree>
   </p:cSld>
   <p:clrMapOvr>
@@ -32733,6 +34133,46 @@
           </a:p>
         </p:txBody>
       </p:sp>
+      <p:sp>
+        <p:nvSpPr>
+          <p:cNvPr id="3" name="ZoneTexte 2">
+            <a:extLst>
+              <a:ext uri="{FF2B5EF4-FFF2-40B4-BE49-F238E27FC236}">
+                <a16:creationId xmlns:a16="http://schemas.microsoft.com/office/drawing/2014/main" id="{D3136753-8159-29EE-12C2-B4D788E87DC1}"/>
+              </a:ext>
+            </a:extLst>
+          </p:cNvPr>
+          <p:cNvSpPr txBox="1"/>
+          <p:nvPr/>
+        </p:nvSpPr>
+        <p:spPr>
+          <a:xfrm>
+            <a:off x="0" y="4864100"/>
+            <a:ext cx="9144000" cy="230832"/>
+          </a:xfrm>
+          <a:prstGeom prst="rect">
+            <a:avLst/>
+          </a:prstGeom>
+          <a:noFill/>
+        </p:spPr>
+        <p:txBody>
+          <a:bodyPr vert="horz" rtlCol="0">
+            <a:spAutoFit/>
+          </a:bodyPr>
+          <a:lstStyle/>
+          <a:p>
+            <a:pPr algn="ctr"/>
+            <a:r>
+              <a:rPr lang="fr-FR" sz="900">
+                <a:solidFill>
+                  <a:srgbClr val="B4B4B4"/>
+                </a:solidFill>
+              </a:rPr>
+              <a:t>(c) titi_23 - mediateur-numerique.github.io - Reproduction interdite sans autorisation</a:t>
+            </a:r>
+          </a:p>
+        </p:txBody>
+      </p:sp>
     </p:spTree>
   </p:cSld>
   <p:clrMapOvr>
@@ -33390,6 +34830,46 @@
           </a:p>
         </p:txBody>
       </p:sp>
+      <p:sp>
+        <p:nvSpPr>
+          <p:cNvPr id="3" name="ZoneTexte 2">
+            <a:extLst>
+              <a:ext uri="{FF2B5EF4-FFF2-40B4-BE49-F238E27FC236}">
+                <a16:creationId xmlns:a16="http://schemas.microsoft.com/office/drawing/2014/main" id="{22A66025-F173-115E-0138-2A0D0FC78A2F}"/>
+              </a:ext>
+            </a:extLst>
+          </p:cNvPr>
+          <p:cNvSpPr txBox="1"/>
+          <p:nvPr/>
+        </p:nvSpPr>
+        <p:spPr>
+          <a:xfrm>
+            <a:off x="0" y="4864100"/>
+            <a:ext cx="9144000" cy="230832"/>
+          </a:xfrm>
+          <a:prstGeom prst="rect">
+            <a:avLst/>
+          </a:prstGeom>
+          <a:noFill/>
+        </p:spPr>
+        <p:txBody>
+          <a:bodyPr vert="horz" rtlCol="0">
+            <a:spAutoFit/>
+          </a:bodyPr>
+          <a:lstStyle/>
+          <a:p>
+            <a:pPr algn="ctr"/>
+            <a:r>
+              <a:rPr lang="fr-FR" sz="900">
+                <a:solidFill>
+                  <a:srgbClr val="B4B4B4"/>
+                </a:solidFill>
+              </a:rPr>
+              <a:t>(c) titi_23 - mediateur-numerique.github.io - Reproduction interdite sans autorisation</a:t>
+            </a:r>
+          </a:p>
+        </p:txBody>
+      </p:sp>
     </p:spTree>
   </p:cSld>
   <p:clrMapOvr>
@@ -33979,6 +35459,46 @@
           </a:p>
         </p:txBody>
       </p:sp>
+      <p:sp>
+        <p:nvSpPr>
+          <p:cNvPr id="3" name="ZoneTexte 2">
+            <a:extLst>
+              <a:ext uri="{FF2B5EF4-FFF2-40B4-BE49-F238E27FC236}">
+                <a16:creationId xmlns:a16="http://schemas.microsoft.com/office/drawing/2014/main" id="{C8FFD63D-0941-3F24-B990-BC55F53AE606}"/>
+              </a:ext>
+            </a:extLst>
+          </p:cNvPr>
+          <p:cNvSpPr txBox="1"/>
+          <p:nvPr/>
+        </p:nvSpPr>
+        <p:spPr>
+          <a:xfrm>
+            <a:off x="0" y="4864100"/>
+            <a:ext cx="9144000" cy="230832"/>
+          </a:xfrm>
+          <a:prstGeom prst="rect">
+            <a:avLst/>
+          </a:prstGeom>
+          <a:noFill/>
+        </p:spPr>
+        <p:txBody>
+          <a:bodyPr vert="horz" rtlCol="0">
+            <a:spAutoFit/>
+          </a:bodyPr>
+          <a:lstStyle/>
+          <a:p>
+            <a:pPr algn="ctr"/>
+            <a:r>
+              <a:rPr lang="fr-FR" sz="900">
+                <a:solidFill>
+                  <a:srgbClr val="B4B4B4"/>
+                </a:solidFill>
+              </a:rPr>
+              <a:t>(c) titi_23 - mediateur-numerique.github.io - Reproduction interdite sans autorisation</a:t>
+            </a:r>
+          </a:p>
+        </p:txBody>
+      </p:sp>
     </p:spTree>
   </p:cSld>
   <p:clrMapOvr>
@@ -34530,6 +36050,46 @@
           </a:p>
         </p:txBody>
       </p:sp>
+      <p:sp>
+        <p:nvSpPr>
+          <p:cNvPr id="3" name="ZoneTexte 2">
+            <a:extLst>
+              <a:ext uri="{FF2B5EF4-FFF2-40B4-BE49-F238E27FC236}">
+                <a16:creationId xmlns:a16="http://schemas.microsoft.com/office/drawing/2014/main" id="{F74D20C0-13D7-2706-D129-50FE0340CBD4}"/>
+              </a:ext>
+            </a:extLst>
+          </p:cNvPr>
+          <p:cNvSpPr txBox="1"/>
+          <p:nvPr/>
+        </p:nvSpPr>
+        <p:spPr>
+          <a:xfrm>
+            <a:off x="0" y="4864100"/>
+            <a:ext cx="9144000" cy="230832"/>
+          </a:xfrm>
+          <a:prstGeom prst="rect">
+            <a:avLst/>
+          </a:prstGeom>
+          <a:noFill/>
+        </p:spPr>
+        <p:txBody>
+          <a:bodyPr vert="horz" rtlCol="0">
+            <a:spAutoFit/>
+          </a:bodyPr>
+          <a:lstStyle/>
+          <a:p>
+            <a:pPr algn="ctr"/>
+            <a:r>
+              <a:rPr lang="fr-FR" sz="900">
+                <a:solidFill>
+                  <a:srgbClr val="B4B4B4"/>
+                </a:solidFill>
+              </a:rPr>
+              <a:t>(c) titi_23 - mediateur-numerique.github.io - Reproduction interdite sans autorisation</a:t>
+            </a:r>
+          </a:p>
+        </p:txBody>
+      </p:sp>
     </p:spTree>
   </p:cSld>
   <p:clrMapOvr>
@@ -35157,6 +36717,46 @@
           </a:p>
         </p:txBody>
       </p:sp>
+      <p:sp>
+        <p:nvSpPr>
+          <p:cNvPr id="3" name="ZoneTexte 2">
+            <a:extLst>
+              <a:ext uri="{FF2B5EF4-FFF2-40B4-BE49-F238E27FC236}">
+                <a16:creationId xmlns:a16="http://schemas.microsoft.com/office/drawing/2014/main" id="{E7A88DC5-3B86-73C2-C48D-1C8D86834AB5}"/>
+              </a:ext>
+            </a:extLst>
+          </p:cNvPr>
+          <p:cNvSpPr txBox="1"/>
+          <p:nvPr/>
+        </p:nvSpPr>
+        <p:spPr>
+          <a:xfrm>
+            <a:off x="0" y="4864100"/>
+            <a:ext cx="9144000" cy="230832"/>
+          </a:xfrm>
+          <a:prstGeom prst="rect">
+            <a:avLst/>
+          </a:prstGeom>
+          <a:noFill/>
+        </p:spPr>
+        <p:txBody>
+          <a:bodyPr vert="horz" rtlCol="0">
+            <a:spAutoFit/>
+          </a:bodyPr>
+          <a:lstStyle/>
+          <a:p>
+            <a:pPr algn="ctr"/>
+            <a:r>
+              <a:rPr lang="fr-FR" sz="900">
+                <a:solidFill>
+                  <a:srgbClr val="B4B4B4"/>
+                </a:solidFill>
+              </a:rPr>
+              <a:t>(c) titi_23 - mediateur-numerique.github.io - Reproduction interdite sans autorisation</a:t>
+            </a:r>
+          </a:p>
+        </p:txBody>
+      </p:sp>
     </p:spTree>
   </p:cSld>
   <p:clrMapOvr>
@@ -36854,6 +38454,46 @@
           </a:p>
         </p:txBody>
       </p:sp>
+      <p:sp>
+        <p:nvSpPr>
+          <p:cNvPr id="47" name="ZoneTexte 46">
+            <a:extLst>
+              <a:ext uri="{FF2B5EF4-FFF2-40B4-BE49-F238E27FC236}">
+                <a16:creationId xmlns:a16="http://schemas.microsoft.com/office/drawing/2014/main" id="{37ECF80F-91F1-8E85-ABD6-0F69512A5B96}"/>
+              </a:ext>
+            </a:extLst>
+          </p:cNvPr>
+          <p:cNvSpPr txBox="1"/>
+          <p:nvPr/>
+        </p:nvSpPr>
+        <p:spPr>
+          <a:xfrm>
+            <a:off x="0" y="4864100"/>
+            <a:ext cx="9144000" cy="230832"/>
+          </a:xfrm>
+          <a:prstGeom prst="rect">
+            <a:avLst/>
+          </a:prstGeom>
+          <a:noFill/>
+        </p:spPr>
+        <p:txBody>
+          <a:bodyPr vert="horz" rtlCol="0">
+            <a:spAutoFit/>
+          </a:bodyPr>
+          <a:lstStyle/>
+          <a:p>
+            <a:pPr algn="ctr"/>
+            <a:r>
+              <a:rPr lang="fr-FR" sz="900">
+                <a:solidFill>
+                  <a:srgbClr val="B4B4B4"/>
+                </a:solidFill>
+              </a:rPr>
+              <a:t>(c) titi_23 - mediateur-numerique.github.io - Reproduction interdite sans autorisation</a:t>
+            </a:r>
+          </a:p>
+        </p:txBody>
+      </p:sp>
     </p:spTree>
   </p:cSld>
   <p:clrMapOvr>
@@ -38506,6 +40146,46 @@
           </a:p>
         </p:txBody>
       </p:sp>
+      <p:sp>
+        <p:nvSpPr>
+          <p:cNvPr id="46" name="ZoneTexte 45">
+            <a:extLst>
+              <a:ext uri="{FF2B5EF4-FFF2-40B4-BE49-F238E27FC236}">
+                <a16:creationId xmlns:a16="http://schemas.microsoft.com/office/drawing/2014/main" id="{BD106ED3-0899-C2AA-67EA-951CD6AF4BEB}"/>
+              </a:ext>
+            </a:extLst>
+          </p:cNvPr>
+          <p:cNvSpPr txBox="1"/>
+          <p:nvPr/>
+        </p:nvSpPr>
+        <p:spPr>
+          <a:xfrm>
+            <a:off x="0" y="4864100"/>
+            <a:ext cx="9144000" cy="230832"/>
+          </a:xfrm>
+          <a:prstGeom prst="rect">
+            <a:avLst/>
+          </a:prstGeom>
+          <a:noFill/>
+        </p:spPr>
+        <p:txBody>
+          <a:bodyPr vert="horz" rtlCol="0">
+            <a:spAutoFit/>
+          </a:bodyPr>
+          <a:lstStyle/>
+          <a:p>
+            <a:pPr algn="ctr"/>
+            <a:r>
+              <a:rPr lang="fr-FR" sz="900">
+                <a:solidFill>
+                  <a:srgbClr val="B4B4B4"/>
+                </a:solidFill>
+              </a:rPr>
+              <a:t>(c) titi_23 - mediateur-numerique.github.io - Reproduction interdite sans autorisation</a:t>
+            </a:r>
+          </a:p>
+        </p:txBody>
+      </p:sp>
     </p:spTree>
   </p:cSld>
   <p:clrMapOvr>
@@ -38912,6 +40592,46 @@
           </a:p>
         </p:txBody>
       </p:sp>
+      <p:sp>
+        <p:nvSpPr>
+          <p:cNvPr id="12" name="ZoneTexte 11">
+            <a:extLst>
+              <a:ext uri="{FF2B5EF4-FFF2-40B4-BE49-F238E27FC236}">
+                <a16:creationId xmlns:a16="http://schemas.microsoft.com/office/drawing/2014/main" id="{8003B774-AF4C-F4D0-F3BA-69EDF0235ECF}"/>
+              </a:ext>
+            </a:extLst>
+          </p:cNvPr>
+          <p:cNvSpPr txBox="1"/>
+          <p:nvPr/>
+        </p:nvSpPr>
+        <p:spPr>
+          <a:xfrm>
+            <a:off x="0" y="4864100"/>
+            <a:ext cx="9144000" cy="230832"/>
+          </a:xfrm>
+          <a:prstGeom prst="rect">
+            <a:avLst/>
+          </a:prstGeom>
+          <a:noFill/>
+        </p:spPr>
+        <p:txBody>
+          <a:bodyPr vert="horz" rtlCol="0">
+            <a:spAutoFit/>
+          </a:bodyPr>
+          <a:lstStyle/>
+          <a:p>
+            <a:pPr algn="ctr"/>
+            <a:r>
+              <a:rPr lang="fr-FR" sz="900">
+                <a:solidFill>
+                  <a:srgbClr val="B4B4B4"/>
+                </a:solidFill>
+              </a:rPr>
+              <a:t>(c) titi_23 - mediateur-numerique.github.io - Reproduction interdite sans autorisation</a:t>
+            </a:r>
+          </a:p>
+        </p:txBody>
+      </p:sp>
     </p:spTree>
   </p:cSld>
   <p:clrMapOvr>
@@ -40160,6 +41880,46 @@
           </a:p>
         </p:txBody>
       </p:sp>
+      <p:sp>
+        <p:nvSpPr>
+          <p:cNvPr id="35" name="ZoneTexte 34">
+            <a:extLst>
+              <a:ext uri="{FF2B5EF4-FFF2-40B4-BE49-F238E27FC236}">
+                <a16:creationId xmlns:a16="http://schemas.microsoft.com/office/drawing/2014/main" id="{9AA53448-5AC7-0D16-E76A-5895B01265B1}"/>
+              </a:ext>
+            </a:extLst>
+          </p:cNvPr>
+          <p:cNvSpPr txBox="1"/>
+          <p:nvPr/>
+        </p:nvSpPr>
+        <p:spPr>
+          <a:xfrm>
+            <a:off x="0" y="4864100"/>
+            <a:ext cx="9144000" cy="230832"/>
+          </a:xfrm>
+          <a:prstGeom prst="rect">
+            <a:avLst/>
+          </a:prstGeom>
+          <a:noFill/>
+        </p:spPr>
+        <p:txBody>
+          <a:bodyPr vert="horz" rtlCol="0">
+            <a:spAutoFit/>
+          </a:bodyPr>
+          <a:lstStyle/>
+          <a:p>
+            <a:pPr algn="ctr"/>
+            <a:r>
+              <a:rPr lang="fr-FR" sz="900">
+                <a:solidFill>
+                  <a:srgbClr val="B4B4B4"/>
+                </a:solidFill>
+              </a:rPr>
+              <a:t>(c) titi_23 - mediateur-numerique.github.io - Reproduction interdite sans autorisation</a:t>
+            </a:r>
+          </a:p>
+        </p:txBody>
+      </p:sp>
     </p:spTree>
   </p:cSld>
   <p:clrMapOvr>
@@ -40563,6 +42323,46 @@
               <a:t>☰  Menu</a:t>
             </a:r>
             <a:endParaRPr lang="en-US" sz="950" dirty="0"/>
+          </a:p>
+        </p:txBody>
+      </p:sp>
+      <p:sp>
+        <p:nvSpPr>
+          <p:cNvPr id="12" name="ZoneTexte 11">
+            <a:extLst>
+              <a:ext uri="{FF2B5EF4-FFF2-40B4-BE49-F238E27FC236}">
+                <a16:creationId xmlns:a16="http://schemas.microsoft.com/office/drawing/2014/main" id="{2D345D7E-83D5-C093-D853-F783DCDCC422}"/>
+              </a:ext>
+            </a:extLst>
+          </p:cNvPr>
+          <p:cNvSpPr txBox="1"/>
+          <p:nvPr/>
+        </p:nvSpPr>
+        <p:spPr>
+          <a:xfrm>
+            <a:off x="0" y="4864100"/>
+            <a:ext cx="9144000" cy="230832"/>
+          </a:xfrm>
+          <a:prstGeom prst="rect">
+            <a:avLst/>
+          </a:prstGeom>
+          <a:noFill/>
+        </p:spPr>
+        <p:txBody>
+          <a:bodyPr vert="horz" rtlCol="0">
+            <a:spAutoFit/>
+          </a:bodyPr>
+          <a:lstStyle/>
+          <a:p>
+            <a:pPr algn="ctr"/>
+            <a:r>
+              <a:rPr lang="fr-FR" sz="900">
+                <a:solidFill>
+                  <a:srgbClr val="B4B4B4"/>
+                </a:solidFill>
+              </a:rPr>
+              <a:t>(c) titi_23 - mediateur-numerique.github.io - Reproduction interdite sans autorisation</a:t>
+            </a:r>
           </a:p>
         </p:txBody>
       </p:sp>
